--- a/teaching_ppt/Ch3_新型收发机技术.pptx
+++ b/teaching_ppt/Ch3_新型收发机技术.pptx
@@ -111,23 +111,23 @@
   <p:extLst>
     <p:ext uri="{521415D9-36F7-43E2-AB2F-B90AF26B5E84}">
       <p14:sectionLst xmlns:p14="http://schemas.microsoft.com/office/powerpoint/2010/main">
-        <p14:section name="封面与目录 Opening" id="{c8563d0a-b9c1-cb8a-f01c-2cbf62ca504d}">
+        <p14:section name="封面与目录 Opening" id="{b09a9b3f-a7aa-8731-a584-867aad8ba9ab}">
           <p14:sldIdLst>
             <p14:sldId id="256"/>
             <p14:sldId id="257"/>
           </p14:sldIdLst>
         </p14:section>
-        <p14:section name="3.1 极化天线与极化赋形" id="{81ff6afa-28f2-8eeb-ea49-811ceb8c18d0}">
+        <p14:section name="3.1 极化天线与极化赋形" id="{c4d77d87-c673-8c7d-6a6a-38f7e6b64725}">
           <p14:sldIdLst>
             <p14:sldId id="258"/>
           </p14:sldIdLst>
         </p14:section>
-        <p14:section name="3.2 里德堡原子接收机" id="{cb188369-ef80-8332-7cb4-c8b756a47694}">
+        <p14:section name="3.2 里德堡原子接收机" id="{987a7840-6ff1-c5c0-1f43-8d56f7de1763}">
           <p14:sldIdLst>
             <p14:sldId id="259"/>
           </p14:sldIdLst>
         </p14:section>
-        <p14:section name="结束 Closing" id="{331081e2-becb-de14-4bed-754d389dab8d}">
+        <p14:section name="结束 Closing" id="{79cfc40a-9f18-2ac6-b2d4-abd997cb51ed}">
           <p14:sldIdLst>
             <p14:sldId id="260"/>
           </p14:sldIdLst>
